--- a/presentations/Day 4 - Classification Data Preparation and Unsupervised Learning/2_baseline_ml_model_activity.pptx
+++ b/presentations/Day 4 - Classification Data Preparation and Unsupervised Learning/2_baseline_ml_model_activity.pptx
@@ -6556,7 +6556,7 @@
                   <a:srgbClr val="FFFFFF"/>
                 </a:solidFill>
               </a:rPr>
-              <a:t>Session 5 notebook</a:t>
+              <a:t>Session 2 notebook</a:t>
             </a:r>
             <a:endParaRPr lang="en-US" sz="850" dirty="0"/>
           </a:p>
